--- a/main/slides_es/resumen-trabajo-amci-4-09-2026.pptx
+++ b/main/slides_es/resumen-trabajo-amci-4-09-2026.pptx
@@ -4190,7 +4190,7 @@
         </p:blipFill>
         <p:spPr>
           <a:xfrm>
-            <a:off x="3910476" y="715682"/>
+            <a:off x="3650667" y="678114"/>
             <a:ext cx="7620000" cy="5283200"/>
           </a:xfrm>
           <a:prstGeom prst="rect">
